--- a/HW13/Модуль 4.pptx
+++ b/HW13/Модуль 4.pptx
@@ -12720,7 +12720,7 @@
       </p:grpSpPr>
       <p:pic>
         <p:nvPicPr>
-          <p:cNvPr id="4" name="Рисунок 3" descr="логотип STEP ACADEMY (белый).png"/>
+          <p:cNvPr id="4" name="Рисунок 3" descr=""/>
           <p:cNvPicPr>
             <a:picLocks noChangeAspect="1"/>
           </p:cNvPicPr>

--- a/HW13/Модуль 4.pptx
+++ b/HW13/Модуль 4.pptx
@@ -12804,7 +12804,7 @@
                   </a:schemeClr>
                 </a:solidFill>
               </a:rPr>
-              <a:t>Зуев Александр</a:t>
+              <a:t/>
             </a:r>
             <a:endParaRPr lang="ru-RU" sz="3600" b="1" i="1" dirty="0">
               <a:ln w="50800"/>
